--- a/assets/ppts/M3.5V_VLAN_IEEE_802.1Q.pptx
+++ b/assets/ppts/M3.5V_VLAN_IEEE_802.1Q.pptx
@@ -8,6 +8,7 @@
     <p:sldId id="256" r:id="rId7"/>
     <p:sldId id="257" r:id="rId8"/>
     <p:sldId id="258" r:id="rId9"/>
+    <p:sldId id="259" r:id="rId10"/>
   </p:sldIdLst>
   <p:sldSz cx="12191695" cy="6858000" type="screen4x3"/>
   <p:notesSz cx="6858000" cy="9144000"/>
@@ -3141,8 +3142,8 @@
         </p:nvSpPr>
         <p:spPr>
           <a:xfrm>
-            <a:off x="822960" y="1188720"/>
-            <a:ext cx="164592" cy="4480560"/>
+            <a:off x="0" y="0"/>
+            <a:ext cx="12191695" cy="137160"/>
           </a:xfrm>
           <a:prstGeom prst="rect">
             <a:avLst/>
@@ -3178,14 +3179,57 @@
       </p:sp>
       <p:sp>
         <p:nvSpPr>
-          <p:cNvPr id="4" name="TextBox 3"/>
+          <p:cNvPr id="4" name="Rectangle 3"/>
+          <p:cNvSpPr/>
+          <p:nvPr/>
+        </p:nvSpPr>
+        <p:spPr>
+          <a:xfrm>
+            <a:off x="822960" y="1097280"/>
+            <a:ext cx="164592" cy="4663440"/>
+          </a:xfrm>
+          <a:prstGeom prst="rect">
+            <a:avLst/>
+          </a:prstGeom>
+          <a:solidFill>
+            <a:srgbClr val="D97706"/>
+          </a:solidFill>
+          <a:ln>
+            <a:noFill/>
+          </a:ln>
+        </p:spPr>
+        <p:style>
+          <a:lnRef idx="1">
+            <a:schemeClr val="accent1"/>
+          </a:lnRef>
+          <a:fillRef idx="3">
+            <a:schemeClr val="accent1"/>
+          </a:fillRef>
+          <a:effectRef idx="2">
+            <a:schemeClr val="accent1"/>
+          </a:effectRef>
+          <a:fontRef idx="minor">
+            <a:schemeClr val="lt1"/>
+          </a:fontRef>
+        </p:style>
+        <p:txBody>
+          <a:bodyPr rtlCol="0" anchor="ctr"/>
+          <a:lstStyle/>
+          <a:p>
+            <a:pPr algn="ctr"/>
+          </a:p>
+        </p:txBody>
+      </p:sp>
+      <p:sp>
+        <p:nvSpPr>
+          <p:cNvPr id="5" name="TextBox 4"/>
           <p:cNvSpPr txBox="1"/>
           <p:nvPr/>
         </p:nvSpPr>
         <p:spPr>
           <a:xfrm>
-            <a:off x="1280160" y="1097280"/>
-            <a:ext cx="10058400" cy="4663440"/>
+            <a:off x="1234440" y="1005840"/>
+            <a:ext cx="10241280" cy="4846320"/>
           </a:xfrm>
           <a:prstGeom prst="rect">
             <a:avLst/>
@@ -3200,70 +3244,165 @@
           <a:p>
             <a:pPr>
               <a:spcAft>
+                <a:spcPts val="1000"/>
+              </a:spcAft>
+              <a:defRPr b="1" sz="1300">
+                <a:solidFill>
+                  <a:srgbClr val="D97706"/>
+                </a:solidFill>
+              </a:defRPr>
+            </a:pPr>
+            <a:r>
+              <a:t>PCCST501 Computer Networks | KTU 2024 Scheme • MODULE 3 • M3.5V</a:t>
+            </a:r>
+          </a:p>
+          <a:p>
+            <a:pPr>
+              <a:spcAft>
                 <a:spcPts val="1200"/>
               </a:spcAft>
-              <a:defRPr b="1" sz="1300">
-                <a:solidFill>
-                  <a:srgbClr val="D97706"/>
+              <a:defRPr b="1" sz="3000">
+                <a:solidFill>
+                  <a:srgbClr val="F8FAFC"/>
                 </a:solidFill>
               </a:defRPr>
             </a:pPr>
             <a:r>
-              <a:t>PCCST501 Computer Networks | KTU 2024 Scheme • MODULE 3 • M3.5V</a:t>
+              <a:t>Virtual Local Area Networks (VLANs - IEEE 802.1Q)</a:t>
             </a:r>
           </a:p>
           <a:p>
             <a:pPr>
               <a:spcAft>
-                <a:spcPts val="1400"/>
+                <a:spcPts val="2400"/>
               </a:spcAft>
-              <a:defRPr b="1" sz="3200">
-                <a:solidFill>
-                  <a:srgbClr val="F8FAFC"/>
+              <a:defRPr sz="1600">
+                <a:solidFill>
+                  <a:srgbClr val="94A3B8"/>
                 </a:solidFill>
               </a:defRPr>
             </a:pPr>
             <a:r>
-              <a:t>Virtual LANs (VLAN - IEEE 802.1Q)</a:t>
+              <a:t>Broadcast Containment, Port-Based vs Tagged VLANs, IEEE 802.1Q 4-Byte Tag (VID 1-4094), Access vs Trunk Ports, Router-on-a-Stick</a:t>
             </a:r>
           </a:p>
           <a:p>
             <a:pPr>
               <a:spcAft>
-                <a:spcPts val="2800"/>
+                <a:spcPts val="300"/>
               </a:spcAft>
-              <a:defRPr sz="1700">
+              <a:defRPr b="1" sz="1350">
+                <a:solidFill>
+                  <a:srgbClr val="E2E8F0"/>
+                </a:solidFill>
+              </a:defRPr>
+            </a:pPr>
+            <a:r>
+              <a:t>Prepared by: Prof. Anju Markose | Assistant Professor, Dept. of CSE | VJCET</a:t>
+            </a:r>
+          </a:p>
+          <a:p>
+            <a:pPr>
+              <a:defRPr sz="1150">
                 <a:solidFill>
                   <a:srgbClr val="94A3B8"/>
                 </a:solidFill>
               </a:defRPr>
             </a:pPr>
             <a:r>
-              <a:t>Broadcast Domain Segmentation, IEEE 802.1Q Frame Tagging, Trunk Ports vs Access Ports &amp; Inter-VLAN Routing</a:t>
-            </a:r>
-          </a:p>
+              <a:t>Viswajyothi College of Engineering and Technology (VJCET), Vazhakulam • KTU S5 CSE</a:t>
+            </a:r>
+          </a:p>
+        </p:txBody>
+      </p:sp>
+      <p:sp>
+        <p:nvSpPr>
+          <p:cNvPr id="6" name="Rounded Rectangle 5"/>
+          <p:cNvSpPr/>
+          <p:nvPr/>
+        </p:nvSpPr>
+        <p:spPr>
+          <a:xfrm>
+            <a:off x="8412480" y="5120640"/>
+            <a:ext cx="3017520" cy="822960"/>
+          </a:xfrm>
+          <a:prstGeom prst="roundRect">
+            <a:avLst/>
+          </a:prstGeom>
+          <a:solidFill>
+            <a:srgbClr val="1E293B"/>
+          </a:solidFill>
+          <a:ln w="12700">
+            <a:solidFill>
+              <a:srgbClr val="0E7490"/>
+            </a:solidFill>
+          </a:ln>
+        </p:spPr>
+        <p:style>
+          <a:lnRef idx="1">
+            <a:schemeClr val="accent1"/>
+          </a:lnRef>
+          <a:fillRef idx="3">
+            <a:schemeClr val="accent1"/>
+          </a:fillRef>
+          <a:effectRef idx="2">
+            <a:schemeClr val="accent1"/>
+          </a:effectRef>
+          <a:fontRef idx="minor">
+            <a:schemeClr val="lt1"/>
+          </a:fontRef>
+        </p:style>
+        <p:txBody>
+          <a:bodyPr rtlCol="0" anchor="ctr"/>
+          <a:lstStyle/>
+          <a:p>
+            <a:pPr algn="ctr"/>
+          </a:p>
+        </p:txBody>
+      </p:sp>
+      <p:sp>
+        <p:nvSpPr>
+          <p:cNvPr id="7" name="TextBox 6"/>
+          <p:cNvSpPr txBox="1"/>
+          <p:nvPr/>
+        </p:nvSpPr>
+        <p:spPr>
+          <a:xfrm>
+            <a:off x="8503920" y="5166360"/>
+            <a:ext cx="2834640" cy="731520"/>
+          </a:xfrm>
+          <a:prstGeom prst="rect">
+            <a:avLst/>
+          </a:prstGeom>
+          <a:noFill/>
+        </p:spPr>
+        <p:txBody>
+          <a:bodyPr wrap="none">
+            <a:spAutoFit/>
+          </a:bodyPr>
+          <a:lstStyle/>
           <a:p>
             <a:pPr>
-              <a:defRPr b="1" sz="1300">
-                <a:solidFill>
-                  <a:srgbClr val="E2E8F0"/>
+              <a:defRPr b="1" sz="1050">
+                <a:solidFill>
+                  <a:srgbClr val="D97706"/>
                 </a:solidFill>
               </a:defRPr>
             </a:pPr>
             <a:r>
-              <a:t>Prepared by: Prof. Anju Markose | Assistant Professor, Dept. of CSE | VJCET</a:t>
+              <a:t>KTU B.Tech Curriculum</a:t>
             </a:r>
           </a:p>
           <a:p>
             <a:pPr>
-              <a:defRPr sz="1100">
-                <a:solidFill>
-                  <a:srgbClr val="94A3B8"/>
+              <a:defRPr sz="950">
+                <a:solidFill>
+                  <a:srgbClr val="F8FAFC"/>
                 </a:solidFill>
               </a:defRPr>
             </a:pPr>
             <a:r>
-              <a:t>Viswajyothi College of Engineering and Technology (VJCET), Vazhakulam</a:t>
+              <a:t>Official Classroom Slide Deck</a:t>
             </a:r>
           </a:p>
         </p:txBody>
@@ -3395,14 +3534,14 @@
           <a:lstStyle/>
           <a:p>
             <a:pPr>
-              <a:defRPr b="1" sz="2300">
+              <a:defRPr b="1" sz="2200">
                 <a:solidFill>
                   <a:srgbClr val="F8FAFC"/>
                 </a:solidFill>
               </a:defRPr>
             </a:pPr>
             <a:r>
-              <a:t>3.5V.1 VLAN Motivation &amp; IEEE 802.1Q Tagging</a:t>
+              <a:t>3.5V.1 VLAN Motivation &amp; IEEE 802.1Q Tagged Framing</a:t>
             </a:r>
           </a:p>
         </p:txBody>
@@ -3450,7 +3589,7 @@
         </p:nvSpPr>
         <p:spPr>
           <a:xfrm>
-            <a:off x="731520" y="1280160"/>
+            <a:off x="731520" y="1234440"/>
             <a:ext cx="6858000" cy="4937760"/>
           </a:xfrm>
           <a:prstGeom prst="rect">
@@ -3468,29 +3607,29 @@
               <a:spcAft>
                 <a:spcPts val="200"/>
               </a:spcAft>
-              <a:defRPr b="1" sz="1500">
+              <a:defRPr b="1" sz="1450">
                 <a:solidFill>
                   <a:srgbClr val="0F1E4A"/>
                 </a:solidFill>
               </a:defRPr>
             </a:pPr>
             <a:r>
-              <a:t>• VLAN Concept</a:t>
+              <a:t>• VLAN Motivation</a:t>
             </a:r>
           </a:p>
           <a:p>
             <a:pPr>
               <a:spcAft>
-                <a:spcPts val="800"/>
+                <a:spcPts val="700"/>
               </a:spcAft>
-              <a:defRPr sz="1300">
-                <a:solidFill>
-                  <a:srgbClr val="1E293B"/>
+              <a:defRPr sz="1250">
+                <a:solidFill>
+                  <a:srgbClr val="0F172A"/>
                 </a:solidFill>
               </a:defRPr>
             </a:pPr>
             <a:r>
-              <a:t>   Logically segments a single physical switch infrastructure into multiple isolated broadcast domains, improving security, traffic management, and bandwidth efficiency.</a:t>
+              <a:t>   Physically co-located hosts can be partitioned into logical broadcast domains regardless of physical switch topology. Prevents broadcast storms, enhances security, and organizes departments logically (e.g., Faculty VLAN, Student VLAN, Lab VLAN).</a:t>
             </a:r>
           </a:p>
           <a:p>
@@ -3498,29 +3637,29 @@
               <a:spcAft>
                 <a:spcPts val="200"/>
               </a:spcAft>
-              <a:defRPr b="1" sz="1500">
+              <a:defRPr b="1" sz="1450">
                 <a:solidFill>
                   <a:srgbClr val="0F1E4A"/>
                 </a:solidFill>
               </a:defRPr>
             </a:pPr>
             <a:r>
-              <a:t>• Access Ports vs Trunk Ports</a:t>
+              <a:t>• Port-Based VLAN (Untagged)</a:t>
             </a:r>
           </a:p>
           <a:p>
             <a:pPr>
               <a:spcAft>
-                <a:spcPts val="800"/>
+                <a:spcPts val="700"/>
               </a:spcAft>
-              <a:defRPr sz="1300">
-                <a:solidFill>
-                  <a:srgbClr val="1E293B"/>
+              <a:defRPr sz="1250">
+                <a:solidFill>
+                  <a:srgbClr val="0F172A"/>
                 </a:solidFill>
               </a:defRPr>
             </a:pPr>
             <a:r>
-              <a:t>   Access Ports: Connect to end devices (PCs, printers); belong to a single VLAN and carry standard untagged Ethernet frames. Trunk Ports: Connect switch-to-switch or switch-to-router; carry multiplexed traffic for multiple VLANs using 802.1Q tags.</a:t>
+              <a:t>   Switch ports assigned static VLAN IDs. Traffic inside switch segregated by port group; frames on access links remain standard untagged Ethernet frames.</a:t>
             </a:r>
           </a:p>
           <a:p>
@@ -3528,29 +3667,29 @@
               <a:spcAft>
                 <a:spcPts val="200"/>
               </a:spcAft>
-              <a:defRPr b="1" sz="1500">
+              <a:defRPr b="1" sz="1450">
                 <a:solidFill>
                   <a:srgbClr val="0F1E4A"/>
                 </a:solidFill>
               </a:defRPr>
             </a:pPr>
             <a:r>
-              <a:t>• IEEE 802.1Q Tag (4 Bytes)</a:t>
+              <a:t>• IEEE 802.1Q Tagged Frame (4 Bytes Inserted after Source MAC)</a:t>
             </a:r>
           </a:p>
           <a:p>
             <a:pPr>
               <a:spcAft>
-                <a:spcPts val="800"/>
+                <a:spcPts val="700"/>
               </a:spcAft>
-              <a:defRPr sz="1300">
-                <a:solidFill>
-                  <a:srgbClr val="1E293B"/>
+              <a:defRPr sz="1250">
+                <a:solidFill>
+                  <a:srgbClr val="0F172A"/>
                 </a:solidFill>
               </a:defRPr>
             </a:pPr>
             <a:r>
-              <a:t>   Inserted between Source MAC and Type/Length fields of standard Ethernet frame.</a:t>
+              <a:t>   1. **TPID (Tag Protocol Identifier - 16 bits)**: Set to `0x8100` (identifies frame as 802.1Q tagged). \n 2. **PCP (Priority Code Point - 3 bits)**: IEEE 802.1p Quality of Service priority (0 to 7). \n 3. **DEI (Drop Eligible Indicator - 1 bit)**: Set to 1 if frame can be dropped during congestion. \n 4. **VID (VLAN Identifier - 12 bits)**: Uniquely identifies VLAN number (1 to 4094; 0 and 4095 reserved).</a:t>
             </a:r>
           </a:p>
           <a:p>
@@ -3558,29 +3697,29 @@
               <a:spcAft>
                 <a:spcPts val="200"/>
               </a:spcAft>
-              <a:defRPr b="1" sz="1500">
+              <a:defRPr b="1" sz="1450">
                 <a:solidFill>
                   <a:srgbClr val="0F1E4A"/>
                 </a:solidFill>
               </a:defRPr>
             </a:pPr>
             <a:r>
-              <a:t>• Tag Fields</a:t>
+              <a:t>• Access Port vs Trunk Port</a:t>
             </a:r>
           </a:p>
           <a:p>
             <a:pPr>
               <a:spcAft>
-                <a:spcPts val="800"/>
+                <a:spcPts val="700"/>
               </a:spcAft>
-              <a:defRPr sz="1300">
-                <a:solidFill>
-                  <a:srgbClr val="1E293B"/>
+              <a:defRPr sz="1250">
+                <a:solidFill>
+                  <a:srgbClr val="0F172A"/>
                 </a:solidFill>
               </a:defRPr>
             </a:pPr>
             <a:r>
-              <a:t>   TPID (Tag Protocol ID: 16b = `0x8100`), Priority Code Point (PCP: 3b QoS), DEI (Drop Eligible: 1b), and VLAN ID (VID: 12 bits = 4094 possible VLANs).</a:t>
+              <a:t>   **Access Port**: Connects end hosts; carries traffic for 1 untagged VLAN only. **Trunk Port**: Interconnects switches/routers; carries multiplexed tagged traffic for multiple VLANs simultaneously.</a:t>
             </a:r>
           </a:p>
         </p:txBody>
@@ -3593,14 +3732,14 @@
         </p:nvSpPr>
         <p:spPr>
           <a:xfrm>
-            <a:off x="7955279" y="1280160"/>
-            <a:ext cx="3566160" cy="4846320"/>
+            <a:off x="7955279" y="1234440"/>
+            <a:ext cx="3566160" cy="4892040"/>
           </a:xfrm>
           <a:prstGeom prst="roundRect">
             <a:avLst/>
           </a:prstGeom>
           <a:solidFill>
-            <a:srgbClr val="F1F5F9"/>
+            <a:srgbClr val="F8FAFC"/>
           </a:solidFill>
           <a:ln w="19050">
             <a:solidFill>
@@ -3638,7 +3777,7 @@
         </p:nvSpPr>
         <p:spPr>
           <a:xfrm>
-            <a:off x="8138160" y="1417320"/>
+            <a:off x="8138160" y="1371600"/>
             <a:ext cx="3200400" cy="4572000"/>
           </a:xfrm>
           <a:prstGeom prst="rect">
@@ -3663,7 +3802,7 @@
               </a:defRPr>
             </a:pPr>
             <a:r>
-              <a:t>802.1Q Tag Format</a:t>
+              <a:t>IEEE 802.1Q Tag</a:t>
             </a:r>
           </a:p>
           <a:p>
@@ -3673,12 +3812,12 @@
               </a:spcAft>
               <a:defRPr sz="1200">
                 <a:solidFill>
-                  <a:srgbClr val="1E293B"/>
+                  <a:srgbClr val="0F172A"/>
                 </a:solidFill>
               </a:defRPr>
             </a:pPr>
             <a:r>
-              <a:t>→ Tag Size: 4 Bytes (32 bits)</a:t>
+              <a:t>→ TPID: 0x8100 (16 bits)</a:t>
             </a:r>
           </a:p>
           <a:p>
@@ -3688,12 +3827,12 @@
               </a:spcAft>
               <a:defRPr sz="1200">
                 <a:solidFill>
-                  <a:srgbClr val="1E293B"/>
+                  <a:srgbClr val="0F172A"/>
                 </a:solidFill>
               </a:defRPr>
             </a:pPr>
             <a:r>
-              <a:t>→ TPID: 0x8100 (16 bits)</a:t>
+              <a:t>→ PCP: 3 bits (QoS Priority)</a:t>
             </a:r>
           </a:p>
           <a:p>
@@ -3703,12 +3842,12 @@
               </a:spcAft>
               <a:defRPr sz="1200">
                 <a:solidFill>
-                  <a:srgbClr val="1E293B"/>
+                  <a:srgbClr val="0F172A"/>
                 </a:solidFill>
               </a:defRPr>
             </a:pPr>
             <a:r>
-              <a:t>→ Priority (PCP): 3 bits (802.1p)</a:t>
+              <a:t>→ DEI: 1 bit (Drop eligibility)</a:t>
             </a:r>
           </a:p>
           <a:p>
@@ -3718,12 +3857,12 @@
               </a:spcAft>
               <a:defRPr sz="1200">
                 <a:solidFill>
-                  <a:srgbClr val="1E293B"/>
+                  <a:srgbClr val="0F172A"/>
                 </a:solidFill>
               </a:defRPr>
             </a:pPr>
             <a:r>
-              <a:t>→ VLAN ID: 12 bits (1 to 4094)</a:t>
+              <a:t>→ VID: 12 bits (4094 VLANs)</a:t>
             </a:r>
           </a:p>
           <a:p>
@@ -3733,12 +3872,27 @@
               </a:spcAft>
               <a:defRPr sz="1200">
                 <a:solidFill>
-                  <a:srgbClr val="1E293B"/>
+                  <a:srgbClr val="0F172A"/>
                 </a:solidFill>
               </a:defRPr>
             </a:pPr>
             <a:r>
-              <a:t>→ Trunking: Carries tagged traffic</a:t>
+              <a:t>→ Trunking: Carries tagged frames</a:t>
+            </a:r>
+          </a:p>
+          <a:p>
+            <a:pPr>
+              <a:spcAft>
+                <a:spcPts val="600"/>
+              </a:spcAft>
+              <a:defRPr sz="1200">
+                <a:solidFill>
+                  <a:srgbClr val="0F172A"/>
+                </a:solidFill>
+              </a:defRPr>
+            </a:pPr>
+            <a:r>
+              <a:t>→ Access: Carries untagged frames</a:t>
             </a:r>
           </a:p>
         </p:txBody>
@@ -3751,8 +3905,8 @@
         </p:nvSpPr>
         <p:spPr>
           <a:xfrm>
-            <a:off x="731520" y="6309360"/>
-            <a:ext cx="10789920" cy="365760"/>
+            <a:off x="731520" y="6327648"/>
+            <a:ext cx="10789920" cy="320040"/>
           </a:xfrm>
           <a:prstGeom prst="rect">
             <a:avLst/>
@@ -3774,6 +3928,41 @@
             </a:pPr>
             <a:r>
               <a:t>PCCST501 Computer Networks | KTU 2024 Scheme | Prof. Anju Markose | Assistant Professor, Dept. of CSE | VJCET</a:t>
+            </a:r>
+          </a:p>
+        </p:txBody>
+      </p:sp>
+      <p:sp>
+        <p:nvSpPr>
+          <p:cNvPr id="10" name="TextBox 9"/>
+          <p:cNvSpPr txBox="1"/>
+          <p:nvPr/>
+        </p:nvSpPr>
+        <p:spPr>
+          <a:xfrm>
+            <a:off x="6858000" y="6327648"/>
+            <a:ext cx="4572000" cy="320040"/>
+          </a:xfrm>
+          <a:prstGeom prst="rect">
+            <a:avLst/>
+          </a:prstGeom>
+          <a:noFill/>
+        </p:spPr>
+        <p:txBody>
+          <a:bodyPr wrap="none">
+            <a:spAutoFit/>
+          </a:bodyPr>
+          <a:lstStyle/>
+          <a:p>
+            <a:pPr algn="r">
+              <a:defRPr sz="950">
+                <a:solidFill>
+                  <a:srgbClr val="64748B"/>
+                </a:solidFill>
+              </a:defRPr>
+            </a:pPr>
+            <a:r>
+              <a:t>Dept. of CSE, VJCET</a:t>
             </a:r>
           </a:p>
         </p:txBody>
@@ -3905,14 +4094,14 @@
           <a:lstStyle/>
           <a:p>
             <a:pPr>
-              <a:defRPr b="1" sz="2300">
+              <a:defRPr b="1" sz="2200">
                 <a:solidFill>
                   <a:srgbClr val="F8FAFC"/>
                 </a:solidFill>
               </a:defRPr>
             </a:pPr>
             <a:r>
-              <a:t>3.5V.2 Inter-VLAN Routing Architectures</a:t>
+              <a:t>3.5V.2 Inter-VLAN Routing: Router-on-a-Stick vs Layer 3 Switch</a:t>
             </a:r>
           </a:p>
         </p:txBody>
@@ -3960,7 +4149,7 @@
         </p:nvSpPr>
         <p:spPr>
           <a:xfrm>
-            <a:off x="731520" y="1280160"/>
+            <a:off x="731520" y="1234440"/>
             <a:ext cx="6858000" cy="4937760"/>
           </a:xfrm>
           <a:prstGeom prst="rect">
@@ -3978,29 +4167,29 @@
               <a:spcAft>
                 <a:spcPts val="200"/>
               </a:spcAft>
-              <a:defRPr b="1" sz="1500">
+              <a:defRPr b="1" sz="1450">
                 <a:solidFill>
                   <a:srgbClr val="0F1E4A"/>
                 </a:solidFill>
               </a:defRPr>
             </a:pPr>
             <a:r>
-              <a:t>• Need for Layer 3 Routing</a:t>
+              <a:t>• Why Inter-VLAN Routing?</a:t>
             </a:r>
           </a:p>
           <a:p>
             <a:pPr>
               <a:spcAft>
-                <a:spcPts val="800"/>
+                <a:spcPts val="700"/>
               </a:spcAft>
-              <a:defRPr sz="1300">
-                <a:solidFill>
-                  <a:srgbClr val="1E293B"/>
+              <a:defRPr sz="1250">
+                <a:solidFill>
+                  <a:srgbClr val="0F172A"/>
                 </a:solidFill>
               </a:defRPr>
             </a:pPr>
             <a:r>
-              <a:t>   Hosts in different VLANs cannot communicate at Layer 2 even if connected to the same physical switch. Communication requires a Layer 3 routing device.</a:t>
+              <a:t>   By design, hosts on different VLANs cannot communicate at Layer 2 even if plugged into the same physical switch. Inter-VLAN routing requires Layer 3 packet forwarding.</a:t>
             </a:r>
           </a:p>
           <a:p>
@@ -4008,29 +4197,29 @@
               <a:spcAft>
                 <a:spcPts val="200"/>
               </a:spcAft>
-              <a:defRPr b="1" sz="1500">
+              <a:defRPr b="1" sz="1450">
                 <a:solidFill>
                   <a:srgbClr val="0F1E4A"/>
                 </a:solidFill>
               </a:defRPr>
             </a:pPr>
             <a:r>
-              <a:t>• Router-on-a-Stick (ROAS)</a:t>
+              <a:t>• Router-on-a-Stick (Legacy Approach)</a:t>
             </a:r>
           </a:p>
           <a:p>
             <a:pPr>
               <a:spcAft>
-                <a:spcPts val="800"/>
+                <a:spcPts val="700"/>
               </a:spcAft>
-              <a:defRPr sz="1300">
-                <a:solidFill>
-                  <a:srgbClr val="1E293B"/>
+              <a:defRPr sz="1250">
+                <a:solidFill>
+                  <a:srgbClr val="0F172A"/>
                 </a:solidFill>
               </a:defRPr>
             </a:pPr>
             <a:r>
-              <a:t>   Single physical router interface connected to switch trunk port. Divided into logical sub-interfaces (e.g. `eth0.10`, `eth0.20`), each configured with the default gateway IP for its respective VLAN.</a:t>
+              <a:t>   A single physical Ethernet interface on an external router is connected to a switch Trunk port. The router interface is divided into logical **Sub-interfaces** (e.g., `eth0.10`, `eth0.20`), each configured with the default gateway IP and 802.1Q encapsulation for its respective VLAN.</a:t>
             </a:r>
           </a:p>
           <a:p>
@@ -4038,29 +4227,29 @@
               <a:spcAft>
                 <a:spcPts val="200"/>
               </a:spcAft>
-              <a:defRPr b="1" sz="1500">
+              <a:defRPr b="1" sz="1450">
                 <a:solidFill>
                   <a:srgbClr val="0F1E4A"/>
                 </a:solidFill>
               </a:defRPr>
             </a:pPr>
             <a:r>
-              <a:t>• Layer 3 Switches (Multilayer Switching)</a:t>
+              <a:t>• Layer 3 Switch (Modern Core Routing)</a:t>
             </a:r>
           </a:p>
           <a:p>
             <a:pPr>
               <a:spcAft>
-                <a:spcPts val="800"/>
+                <a:spcPts val="700"/>
               </a:spcAft>
-              <a:defRPr sz="1300">
-                <a:solidFill>
-                  <a:srgbClr val="1E293B"/>
+              <a:defRPr sz="1250">
+                <a:solidFill>
+                  <a:srgbClr val="0F172A"/>
                 </a:solidFill>
               </a:defRPr>
             </a:pPr>
             <a:r>
-              <a:t>   High-performance switch with built-in hardware ASIC IP routing. Switch Virtual Interfaces (SVIs: `interface vlan 10`) provide wirespeed line-rate Inter-VLAN forwarding without external router bottlenecks.</a:t>
+              <a:t>   Switches with built-in hardware ASIC routing capabilities. Configured with **Switched Virtual Interfaces (SVIs)** (`interface vlan 10`, `interface vlan 20`) providing multi-gigabit wire-speed inter-VLAN routing without external router bottleneck.</a:t>
             </a:r>
           </a:p>
         </p:txBody>
@@ -4073,14 +4262,14 @@
         </p:nvSpPr>
         <p:spPr>
           <a:xfrm>
-            <a:off x="7955279" y="1280160"/>
-            <a:ext cx="3566160" cy="4846320"/>
+            <a:off x="7955279" y="1234440"/>
+            <a:ext cx="3566160" cy="4892040"/>
           </a:xfrm>
           <a:prstGeom prst="roundRect">
             <a:avLst/>
           </a:prstGeom>
           <a:solidFill>
-            <a:srgbClr val="F1F5F9"/>
+            <a:srgbClr val="F8FAFC"/>
           </a:solidFill>
           <a:ln w="19050">
             <a:solidFill>
@@ -4118,7 +4307,7 @@
         </p:nvSpPr>
         <p:spPr>
           <a:xfrm>
-            <a:off x="8138160" y="1417320"/>
+            <a:off x="8138160" y="1371600"/>
             <a:ext cx="3200400" cy="4572000"/>
           </a:xfrm>
           <a:prstGeom prst="rect">
@@ -4153,12 +4342,12 @@
               </a:spcAft>
               <a:defRPr sz="1200">
                 <a:solidFill>
-                  <a:srgbClr val="1E293B"/>
+                  <a:srgbClr val="0F172A"/>
                 </a:solidFill>
               </a:defRPr>
             </a:pPr>
             <a:r>
-              <a:t>→ Legacy: Dedicated router port per VLAN</a:t>
+              <a:t>→ Router-on-a-Stick: 1 Trunk link</a:t>
             </a:r>
           </a:p>
           <a:p>
@@ -4168,12 +4357,12 @@
               </a:spcAft>
               <a:defRPr sz="1200">
                 <a:solidFill>
-                  <a:srgbClr val="1E293B"/>
+                  <a:srgbClr val="0F172A"/>
                 </a:solidFill>
               </a:defRPr>
             </a:pPr>
             <a:r>
-              <a:t>→ Router-on-a-Stick: 802.1Q sub-interfaces</a:t>
+              <a:t>→ Sub-interfaces: eth0.10, eth0.20</a:t>
             </a:r>
           </a:p>
           <a:p>
@@ -4183,12 +4372,12 @@
               </a:spcAft>
               <a:defRPr sz="1200">
                 <a:solidFill>
-                  <a:srgbClr val="1E293B"/>
+                  <a:srgbClr val="0F172A"/>
                 </a:solidFill>
               </a:defRPr>
             </a:pPr>
             <a:r>
-              <a:t>→ Layer 3 Switch: SVI hardware routing</a:t>
+              <a:t>→ L3 Switch: Hardware SVI routing</a:t>
             </a:r>
           </a:p>
           <a:p>
@@ -4198,12 +4387,27 @@
               </a:spcAft>
               <a:defRPr sz="1200">
                 <a:solidFill>
-                  <a:srgbClr val="1E293B"/>
+                  <a:srgbClr val="0F172A"/>
                 </a:solidFill>
               </a:defRPr>
             </a:pPr>
             <a:r>
-              <a:t>→ Separates broadcast, secures subnets</a:t>
+              <a:t>→ Wire-speed routing in L3 switch</a:t>
+            </a:r>
+          </a:p>
+          <a:p>
+            <a:pPr>
+              <a:spcAft>
+                <a:spcPts val="600"/>
+              </a:spcAft>
+              <a:defRPr sz="1200">
+                <a:solidFill>
+                  <a:srgbClr val="0F172A"/>
+                </a:solidFill>
+              </a:defRPr>
+            </a:pPr>
+            <a:r>
+              <a:t>→ Isolates broadcast domains</a:t>
             </a:r>
           </a:p>
         </p:txBody>
@@ -4216,8 +4420,8 @@
         </p:nvSpPr>
         <p:spPr>
           <a:xfrm>
-            <a:off x="731520" y="6309360"/>
-            <a:ext cx="10789920" cy="365760"/>
+            <a:off x="731520" y="6327648"/>
+            <a:ext cx="10789920" cy="320040"/>
           </a:xfrm>
           <a:prstGeom prst="rect">
             <a:avLst/>
@@ -4239,6 +4443,541 @@
             </a:pPr>
             <a:r>
               <a:t>PCCST501 Computer Networks | KTU 2024 Scheme | Prof. Anju Markose | Assistant Professor, Dept. of CSE | VJCET</a:t>
+            </a:r>
+          </a:p>
+        </p:txBody>
+      </p:sp>
+      <p:sp>
+        <p:nvSpPr>
+          <p:cNvPr id="10" name="TextBox 9"/>
+          <p:cNvSpPr txBox="1"/>
+          <p:nvPr/>
+        </p:nvSpPr>
+        <p:spPr>
+          <a:xfrm>
+            <a:off x="6858000" y="6327648"/>
+            <a:ext cx="4572000" cy="320040"/>
+          </a:xfrm>
+          <a:prstGeom prst="rect">
+            <a:avLst/>
+          </a:prstGeom>
+          <a:noFill/>
+        </p:spPr>
+        <p:txBody>
+          <a:bodyPr wrap="none">
+            <a:spAutoFit/>
+          </a:bodyPr>
+          <a:lstStyle/>
+          <a:p>
+            <a:pPr algn="r">
+              <a:defRPr sz="950">
+                <a:solidFill>
+                  <a:srgbClr val="64748B"/>
+                </a:solidFill>
+              </a:defRPr>
+            </a:pPr>
+            <a:r>
+              <a:t>Dept. of CSE, VJCET</a:t>
+            </a:r>
+          </a:p>
+        </p:txBody>
+      </p:sp>
+    </p:spTree>
+  </p:cSld>
+  <p:clrMapOvr>
+    <a:masterClrMapping/>
+  </p:clrMapOvr>
+</p:sld>
+</file>
+
+<file path=ppt/slides/slide4.xml><?xml version="1.0" encoding="utf-8"?>
+<p:sld xmlns:a="http://schemas.openxmlformats.org/drawingml/2006/main" xmlns:p="http://schemas.openxmlformats.org/presentationml/2006/main" xmlns:r="http://schemas.openxmlformats.org/officeDocument/2006/relationships">
+  <p:cSld>
+    <p:spTree>
+      <p:nvGrpSpPr>
+        <p:cNvPr id="1" name=""/>
+        <p:cNvGrpSpPr/>
+        <p:nvPr/>
+      </p:nvGrpSpPr>
+      <p:grpSpPr/>
+      <p:sp>
+        <p:nvSpPr>
+          <p:cNvPr id="2" name="Rectangle 1"/>
+          <p:cNvSpPr/>
+          <p:nvPr/>
+        </p:nvSpPr>
+        <p:spPr>
+          <a:xfrm>
+            <a:off x="0" y="0"/>
+            <a:ext cx="12191695" cy="1005840"/>
+          </a:xfrm>
+          <a:prstGeom prst="rect">
+            <a:avLst/>
+          </a:prstGeom>
+          <a:solidFill>
+            <a:srgbClr val="0F1E4A"/>
+          </a:solidFill>
+          <a:ln>
+            <a:noFill/>
+          </a:ln>
+        </p:spPr>
+        <p:style>
+          <a:lnRef idx="1">
+            <a:schemeClr val="accent1"/>
+          </a:lnRef>
+          <a:fillRef idx="3">
+            <a:schemeClr val="accent1"/>
+          </a:fillRef>
+          <a:effectRef idx="2">
+            <a:schemeClr val="accent1"/>
+          </a:effectRef>
+          <a:fontRef idx="minor">
+            <a:schemeClr val="lt1"/>
+          </a:fontRef>
+        </p:style>
+        <p:txBody>
+          <a:bodyPr rtlCol="0" anchor="ctr"/>
+          <a:lstStyle/>
+          <a:p>
+            <a:pPr algn="ctr"/>
+          </a:p>
+        </p:txBody>
+      </p:sp>
+      <p:sp>
+        <p:nvSpPr>
+          <p:cNvPr id="3" name="Rectangle 2"/>
+          <p:cNvSpPr/>
+          <p:nvPr/>
+        </p:nvSpPr>
+        <p:spPr>
+          <a:xfrm>
+            <a:off x="0" y="969264"/>
+            <a:ext cx="12191695" cy="36576"/>
+          </a:xfrm>
+          <a:prstGeom prst="rect">
+            <a:avLst/>
+          </a:prstGeom>
+          <a:solidFill>
+            <a:srgbClr val="D97706"/>
+          </a:solidFill>
+          <a:ln>
+            <a:noFill/>
+          </a:ln>
+        </p:spPr>
+        <p:style>
+          <a:lnRef idx="1">
+            <a:schemeClr val="accent1"/>
+          </a:lnRef>
+          <a:fillRef idx="3">
+            <a:schemeClr val="accent1"/>
+          </a:fillRef>
+          <a:effectRef idx="2">
+            <a:schemeClr val="accent1"/>
+          </a:effectRef>
+          <a:fontRef idx="minor">
+            <a:schemeClr val="lt1"/>
+          </a:fontRef>
+        </p:style>
+        <p:txBody>
+          <a:bodyPr rtlCol="0" anchor="ctr"/>
+          <a:lstStyle/>
+          <a:p>
+            <a:pPr algn="ctr"/>
+          </a:p>
+        </p:txBody>
+      </p:sp>
+      <p:sp>
+        <p:nvSpPr>
+          <p:cNvPr id="4" name="TextBox 3"/>
+          <p:cNvSpPr txBox="1"/>
+          <p:nvPr/>
+        </p:nvSpPr>
+        <p:spPr>
+          <a:xfrm>
+            <a:off x="731520" y="164592"/>
+            <a:ext cx="8412480" cy="685800"/>
+          </a:xfrm>
+          <a:prstGeom prst="rect">
+            <a:avLst/>
+          </a:prstGeom>
+          <a:noFill/>
+        </p:spPr>
+        <p:txBody>
+          <a:bodyPr wrap="none">
+            <a:spAutoFit/>
+          </a:bodyPr>
+          <a:lstStyle/>
+          <a:p>
+            <a:pPr>
+              <a:defRPr b="1" sz="2100">
+                <a:solidFill>
+                  <a:srgbClr val="F8FAFC"/>
+                </a:solidFill>
+              </a:defRPr>
+            </a:pPr>
+            <a:r>
+              <a:t>🎯 Exam Booster &amp; Review: Virtual LANs (VLANs)</a:t>
+            </a:r>
+          </a:p>
+        </p:txBody>
+      </p:sp>
+      <p:sp>
+        <p:nvSpPr>
+          <p:cNvPr id="5" name="TextBox 4"/>
+          <p:cNvSpPr txBox="1"/>
+          <p:nvPr/>
+        </p:nvSpPr>
+        <p:spPr>
+          <a:xfrm>
+            <a:off x="8229600" y="164592"/>
+            <a:ext cx="3291840" cy="685800"/>
+          </a:xfrm>
+          <a:prstGeom prst="rect">
+            <a:avLst/>
+          </a:prstGeom>
+          <a:noFill/>
+        </p:spPr>
+        <p:txBody>
+          <a:bodyPr wrap="none">
+            <a:spAutoFit/>
+          </a:bodyPr>
+          <a:lstStyle/>
+          <a:p>
+            <a:pPr algn="r">
+              <a:defRPr b="1" sz="1300">
+                <a:solidFill>
+                  <a:srgbClr val="D97706"/>
+                </a:solidFill>
+              </a:defRPr>
+            </a:pPr>
+            <a:r>
+              <a:t>M3.5V</a:t>
+            </a:r>
+          </a:p>
+        </p:txBody>
+      </p:sp>
+      <p:sp>
+        <p:nvSpPr>
+          <p:cNvPr id="6" name="Rounded Rectangle 5"/>
+          <p:cNvSpPr/>
+          <p:nvPr/>
+        </p:nvSpPr>
+        <p:spPr>
+          <a:xfrm>
+            <a:off x="731520" y="1234440"/>
+            <a:ext cx="5303520" cy="4892040"/>
+          </a:xfrm>
+          <a:prstGeom prst="roundRect">
+            <a:avLst/>
+          </a:prstGeom>
+          <a:solidFill>
+            <a:srgbClr val="FEF3C7"/>
+          </a:solidFill>
+          <a:ln w="19050">
+            <a:solidFill>
+              <a:srgbClr val="D97706"/>
+            </a:solidFill>
+          </a:ln>
+        </p:spPr>
+        <p:style>
+          <a:lnRef idx="1">
+            <a:schemeClr val="accent1"/>
+          </a:lnRef>
+          <a:fillRef idx="3">
+            <a:schemeClr val="accent1"/>
+          </a:fillRef>
+          <a:effectRef idx="2">
+            <a:schemeClr val="accent1"/>
+          </a:effectRef>
+          <a:fontRef idx="minor">
+            <a:schemeClr val="lt1"/>
+          </a:fontRef>
+        </p:style>
+        <p:txBody>
+          <a:bodyPr rtlCol="0" anchor="ctr"/>
+          <a:lstStyle/>
+          <a:p>
+            <a:pPr algn="ctr"/>
+          </a:p>
+        </p:txBody>
+      </p:sp>
+      <p:sp>
+        <p:nvSpPr>
+          <p:cNvPr id="7" name="TextBox 6"/>
+          <p:cNvSpPr txBox="1"/>
+          <p:nvPr/>
+        </p:nvSpPr>
+        <p:spPr>
+          <a:xfrm>
+            <a:off x="914400" y="1371600"/>
+            <a:ext cx="4937760" cy="4572000"/>
+          </a:xfrm>
+          <a:prstGeom prst="rect">
+            <a:avLst/>
+          </a:prstGeom>
+          <a:noFill/>
+        </p:spPr>
+        <p:txBody>
+          <a:bodyPr wrap="square">
+            <a:spAutoFit/>
+          </a:bodyPr>
+          <a:lstStyle/>
+          <a:p>
+            <a:pPr>
+              <a:spcAft>
+                <a:spcPts val="1000"/>
+              </a:spcAft>
+              <a:defRPr b="1" sz="1450">
+                <a:solidFill>
+                  <a:srgbClr val="D97706"/>
+                </a:solidFill>
+              </a:defRPr>
+            </a:pPr>
+            <a:r>
+              <a:t>📚 KTU High-Yield Questions (K3 Apply)</a:t>
+            </a:r>
+          </a:p>
+          <a:p>
+            <a:pPr>
+              <a:spcAft>
+                <a:spcPts val="700"/>
+              </a:spcAft>
+              <a:defRPr sz="1200">
+                <a:solidFill>
+                  <a:srgbClr val="0F172A"/>
+                </a:solidFill>
+              </a:defRPr>
+            </a:pPr>
+            <a:r>
+              <a:t>Q: Explain the benefits of VLANs and illustrate the 4-byte IEEE 802.1Q tag header format. (7 Marks)</a:t>
+            </a:r>
+          </a:p>
+          <a:p>
+            <a:pPr>
+              <a:spcAft>
+                <a:spcPts val="700"/>
+              </a:spcAft>
+              <a:defRPr sz="1200">
+                <a:solidFill>
+                  <a:srgbClr val="0F172A"/>
+                </a:solidFill>
+              </a:defRPr>
+            </a:pPr>
+            <a:r>
+              <a:t>Q: Differentiate between Access ports and Trunk ports on an Ethernet switch. (5 Marks)</a:t>
+            </a:r>
+          </a:p>
+          <a:p>
+            <a:pPr>
+              <a:spcAft>
+                <a:spcPts val="700"/>
+              </a:spcAft>
+              <a:defRPr sz="1200">
+                <a:solidFill>
+                  <a:srgbClr val="0F172A"/>
+                </a:solidFill>
+              </a:defRPr>
+            </a:pPr>
+            <a:r>
+              <a:t>Q: Explain Inter-VLAN routing using the Router-on-a-Stick architecture with a network diagram and configuration concepts. (7 Marks)</a:t>
+            </a:r>
+          </a:p>
+        </p:txBody>
+      </p:sp>
+      <p:sp>
+        <p:nvSpPr>
+          <p:cNvPr id="8" name="Rounded Rectangle 7"/>
+          <p:cNvSpPr/>
+          <p:nvPr/>
+        </p:nvSpPr>
+        <p:spPr>
+          <a:xfrm>
+            <a:off x="6309360" y="1234440"/>
+            <a:ext cx="5212080" cy="4892040"/>
+          </a:xfrm>
+          <a:prstGeom prst="roundRect">
+            <a:avLst/>
+          </a:prstGeom>
+          <a:solidFill>
+            <a:srgbClr val="EEF2FF"/>
+          </a:solidFill>
+          <a:ln w="19050">
+            <a:solidFill>
+              <a:srgbClr val="0E7490"/>
+            </a:solidFill>
+          </a:ln>
+        </p:spPr>
+        <p:style>
+          <a:lnRef idx="1">
+            <a:schemeClr val="accent1"/>
+          </a:lnRef>
+          <a:fillRef idx="3">
+            <a:schemeClr val="accent1"/>
+          </a:fillRef>
+          <a:effectRef idx="2">
+            <a:schemeClr val="accent1"/>
+          </a:effectRef>
+          <a:fontRef idx="minor">
+            <a:schemeClr val="lt1"/>
+          </a:fontRef>
+        </p:style>
+        <p:txBody>
+          <a:bodyPr rtlCol="0" anchor="ctr"/>
+          <a:lstStyle/>
+          <a:p>
+            <a:pPr algn="ctr"/>
+          </a:p>
+        </p:txBody>
+      </p:sp>
+      <p:sp>
+        <p:nvSpPr>
+          <p:cNvPr id="9" name="TextBox 8"/>
+          <p:cNvSpPr txBox="1"/>
+          <p:nvPr/>
+        </p:nvSpPr>
+        <p:spPr>
+          <a:xfrm>
+            <a:off x="6492240" y="1371600"/>
+            <a:ext cx="4846320" cy="4572000"/>
+          </a:xfrm>
+          <a:prstGeom prst="rect">
+            <a:avLst/>
+          </a:prstGeom>
+          <a:noFill/>
+        </p:spPr>
+        <p:txBody>
+          <a:bodyPr wrap="square">
+            <a:spAutoFit/>
+          </a:bodyPr>
+          <a:lstStyle/>
+          <a:p>
+            <a:pPr>
+              <a:spcAft>
+                <a:spcPts val="1000"/>
+              </a:spcAft>
+              <a:defRPr b="1" sz="1450">
+                <a:solidFill>
+                  <a:srgbClr val="0E7490"/>
+                </a:solidFill>
+              </a:defRPr>
+            </a:pPr>
+            <a:r>
+              <a:t>💡 Critical Conceptual Takeaways</a:t>
+            </a:r>
+          </a:p>
+          <a:p>
+            <a:pPr>
+              <a:spcAft>
+                <a:spcPts val="600"/>
+              </a:spcAft>
+              <a:defRPr sz="1200">
+                <a:solidFill>
+                  <a:srgbClr val="0F172A"/>
+                </a:solidFill>
+              </a:defRPr>
+            </a:pPr>
+            <a:r>
+              <a:t>✔ VLANs partition a single physical switch into multiple isolated broadcast domains.</a:t>
+            </a:r>
+          </a:p>
+          <a:p>
+            <a:pPr>
+              <a:spcAft>
+                <a:spcPts val="600"/>
+              </a:spcAft>
+              <a:defRPr sz="1200">
+                <a:solidFill>
+                  <a:srgbClr val="0F172A"/>
+                </a:solidFill>
+              </a:defRPr>
+            </a:pPr>
+            <a:r>
+              <a:t>✔ IEEE 802.1Q tag inserts 4 bytes (TPID 0x8100 + 12-bit VID for 4094 VLANs).</a:t>
+            </a:r>
+          </a:p>
+          <a:p>
+            <a:pPr>
+              <a:spcAft>
+                <a:spcPts val="600"/>
+              </a:spcAft>
+              <a:defRPr sz="1200">
+                <a:solidFill>
+                  <a:srgbClr val="0F172A"/>
+                </a:solidFill>
+              </a:defRPr>
+            </a:pPr>
+            <a:r>
+              <a:t>✔ Trunk links carry tagged multiplexed frames between switches and routers.</a:t>
+            </a:r>
+          </a:p>
+        </p:txBody>
+      </p:sp>
+      <p:sp>
+        <p:nvSpPr>
+          <p:cNvPr id="10" name="TextBox 9"/>
+          <p:cNvSpPr txBox="1"/>
+          <p:nvPr/>
+        </p:nvSpPr>
+        <p:spPr>
+          <a:xfrm>
+            <a:off x="731520" y="6327648"/>
+            <a:ext cx="10789920" cy="320040"/>
+          </a:xfrm>
+          <a:prstGeom prst="rect">
+            <a:avLst/>
+          </a:prstGeom>
+          <a:noFill/>
+        </p:spPr>
+        <p:txBody>
+          <a:bodyPr wrap="none">
+            <a:spAutoFit/>
+          </a:bodyPr>
+          <a:lstStyle/>
+          <a:p>
+            <a:pPr>
+              <a:defRPr sz="950">
+                <a:solidFill>
+                  <a:srgbClr val="64748B"/>
+                </a:solidFill>
+              </a:defRPr>
+            </a:pPr>
+            <a:r>
+              <a:t>PCCST501 Computer Networks | KTU 2024 Scheme | Prof. Anju Markose | Assistant Professor, Dept. of CSE | VJCET</a:t>
+            </a:r>
+          </a:p>
+        </p:txBody>
+      </p:sp>
+      <p:sp>
+        <p:nvSpPr>
+          <p:cNvPr id="11" name="TextBox 10"/>
+          <p:cNvSpPr txBox="1"/>
+          <p:nvPr/>
+        </p:nvSpPr>
+        <p:spPr>
+          <a:xfrm>
+            <a:off x="6858000" y="6327648"/>
+            <a:ext cx="4572000" cy="320040"/>
+          </a:xfrm>
+          <a:prstGeom prst="rect">
+            <a:avLst/>
+          </a:prstGeom>
+          <a:noFill/>
+        </p:spPr>
+        <p:txBody>
+          <a:bodyPr wrap="none">
+            <a:spAutoFit/>
+          </a:bodyPr>
+          <a:lstStyle/>
+          <a:p>
+            <a:pPr algn="r">
+              <a:defRPr sz="950">
+                <a:solidFill>
+                  <a:srgbClr val="64748B"/>
+                </a:solidFill>
+              </a:defRPr>
+            </a:pPr>
+            <a:r>
+              <a:t>Dept. of CSE, VJCET</a:t>
             </a:r>
           </a:p>
         </p:txBody>
